--- a/test-corpus/word-verification/block.pptx
+++ b/test-corpus/word-verification/block.pptx
@@ -144,8 +144,8 @@
         </p:nvSpPr>
         <p:spPr>
           <a:xfrm>
-            <a:off x="2322739" y="1455057"/>
-            <a:ext cx="2344964" cy="1193800"/>
+            <a:off x="814296" y="1822143"/>
+            <a:ext cx="1964026" cy="999868"/>
           </a:xfrm>
           <a:prstGeom prst="rect">
             <a:avLst/>
@@ -153,7 +153,7 @@
           <a:solidFill>
             <a:srgbClr val="DAE8FC"/>
           </a:solidFill>
-          <a:ln w="21318">
+          <a:ln w="17855">
             <a:solidFill>
               <a:srgbClr val="6C8EBF"/>
             </a:solidFill>
@@ -168,8 +168,8 @@
         </p:nvSpPr>
         <p:spPr>
           <a:xfrm>
-            <a:off x="2322739" y="1455057"/>
-            <a:ext cx="2344964" cy="1193800"/>
+            <a:off x="814296" y="1822143"/>
+            <a:ext cx="1964026" cy="999868"/>
           </a:xfrm>
           <a:prstGeom prst="rect">
             <a:avLst/>
@@ -192,7 +192,7 @@
               </a:spcAft>
             </a:pPr>
             <a:r>
-              <a:rPr lang="en-US" sz="2462" dirty="0">
+              <a:rPr lang="en-US" sz="2062" dirty="0">
                 <a:solidFill>
                   <a:srgbClr val="000000"/>
                 </a:solidFill>
@@ -210,8 +210,8 @@
         </p:nvSpPr>
         <p:spPr>
           <a:xfrm>
-            <a:off x="7524296" y="1455057"/>
-            <a:ext cx="2344964" cy="1193800"/>
+            <a:off x="5170862" y="1822143"/>
+            <a:ext cx="1964026" cy="999868"/>
           </a:xfrm>
           <a:prstGeom prst="rect">
             <a:avLst/>
@@ -219,7 +219,7 @@
           <a:solidFill>
             <a:srgbClr val="DAE8FC"/>
           </a:solidFill>
-          <a:ln w="21318">
+          <a:ln w="17855">
             <a:solidFill>
               <a:srgbClr val="6C8EBF"/>
             </a:solidFill>
@@ -234,8 +234,8 @@
         </p:nvSpPr>
         <p:spPr>
           <a:xfrm>
-            <a:off x="7524296" y="1455057"/>
-            <a:ext cx="2344964" cy="1193800"/>
+            <a:off x="5170862" y="1822143"/>
+            <a:ext cx="1964026" cy="999868"/>
           </a:xfrm>
           <a:prstGeom prst="rect">
             <a:avLst/>
@@ -258,7 +258,7 @@
               </a:spcAft>
             </a:pPr>
             <a:r>
-              <a:rPr lang="en-US" sz="2462" dirty="0">
+              <a:rPr lang="en-US" sz="2062" dirty="0">
                 <a:solidFill>
                   <a:srgbClr val="000000"/>
                 </a:solidFill>
@@ -276,8 +276,8 @@
         </p:nvSpPr>
         <p:spPr>
           <a:xfrm>
-            <a:off x="2322739" y="2904671"/>
-            <a:ext cx="7546521" cy="1620157"/>
+            <a:off x="814296" y="3036268"/>
+            <a:ext cx="6320593" cy="1356963"/>
           </a:xfrm>
           <a:prstGeom prst="roundRect">
             <a:avLst/>
@@ -285,7 +285,7 @@
           <a:solidFill>
             <a:srgbClr val="F5F5F5"/>
           </a:solidFill>
-          <a:ln w="21318">
+          <a:ln w="17855">
             <a:solidFill>
               <a:srgbClr val="BFBFBF"/>
             </a:solidFill>
@@ -300,8 +300,8 @@
         </p:nvSpPr>
         <p:spPr>
           <a:xfrm>
-            <a:off x="2535918" y="3117850"/>
-            <a:ext cx="2202845" cy="1193800"/>
+            <a:off x="992843" y="3214816"/>
+            <a:ext cx="1844994" cy="999868"/>
           </a:xfrm>
           <a:prstGeom prst="rect">
             <a:avLst/>
@@ -309,7 +309,7 @@
           <a:solidFill>
             <a:srgbClr val="DAE8FC"/>
           </a:solidFill>
-          <a:ln w="21318">
+          <a:ln w="17855">
             <a:solidFill>
               <a:srgbClr val="6C8EBF"/>
             </a:solidFill>
@@ -324,8 +324,8 @@
         </p:nvSpPr>
         <p:spPr>
           <a:xfrm>
-            <a:off x="2535918" y="3117850"/>
-            <a:ext cx="2202845" cy="1193800"/>
+            <a:off x="992843" y="3214816"/>
+            <a:ext cx="1844994" cy="999868"/>
           </a:xfrm>
           <a:prstGeom prst="rect">
             <a:avLst/>
@@ -348,7 +348,7 @@
               </a:spcAft>
             </a:pPr>
             <a:r>
-              <a:rPr lang="en-US" sz="2462" dirty="0">
+              <a:rPr lang="en-US" sz="2062" dirty="0">
                 <a:solidFill>
                   <a:srgbClr val="000000"/>
                 </a:solidFill>
@@ -366,8 +366,8 @@
         </p:nvSpPr>
         <p:spPr>
           <a:xfrm>
-            <a:off x="4994577" y="3117850"/>
-            <a:ext cx="2202845" cy="1193800"/>
+            <a:off x="3052095" y="3214816"/>
+            <a:ext cx="1844994" cy="999868"/>
           </a:xfrm>
           <a:prstGeom prst="roundRect">
             <a:avLst/>
@@ -375,7 +375,7 @@
           <a:solidFill>
             <a:srgbClr val="DAE8FC"/>
           </a:solidFill>
-          <a:ln w="21318">
+          <a:ln w="17855">
             <a:solidFill>
               <a:srgbClr val="6C8EBF"/>
             </a:solidFill>
@@ -390,8 +390,8 @@
         </p:nvSpPr>
         <p:spPr>
           <a:xfrm>
-            <a:off x="4994577" y="3117850"/>
-            <a:ext cx="2202845" cy="1193800"/>
+            <a:off x="3052095" y="3214816"/>
+            <a:ext cx="1844994" cy="999868"/>
           </a:xfrm>
           <a:prstGeom prst="rect">
             <a:avLst/>
@@ -414,7 +414,7 @@
               </a:spcAft>
             </a:pPr>
             <a:r>
-              <a:rPr lang="en-US" sz="2462" dirty="0">
+              <a:rPr lang="en-US" sz="2062" dirty="0">
                 <a:solidFill>
                   <a:srgbClr val="000000"/>
                 </a:solidFill>
@@ -432,8 +432,8 @@
         </p:nvSpPr>
         <p:spPr>
           <a:xfrm>
-            <a:off x="7453237" y="3117850"/>
-            <a:ext cx="2202845" cy="1193800"/>
+            <a:off x="5111346" y="3214816"/>
+            <a:ext cx="1844994" cy="999868"/>
           </a:xfrm>
           <a:prstGeom prst="roundRect">
             <a:avLst/>
@@ -441,7 +441,7 @@
           <a:solidFill>
             <a:srgbClr val="DAE8FC"/>
           </a:solidFill>
-          <a:ln w="21318">
+          <a:ln w="17855">
             <a:solidFill>
               <a:srgbClr val="6C8EBF"/>
             </a:solidFill>
@@ -456,8 +456,8 @@
         </p:nvSpPr>
         <p:spPr>
           <a:xfrm>
-            <a:off x="7453237" y="3117850"/>
-            <a:ext cx="2202845" cy="1193800"/>
+            <a:off x="5111346" y="3214816"/>
+            <a:ext cx="1844994" cy="999868"/>
           </a:xfrm>
           <a:prstGeom prst="rect">
             <a:avLst/>
@@ -480,7 +480,7 @@
               </a:spcAft>
             </a:pPr>
             <a:r>
-              <a:rPr lang="en-US" sz="2462" dirty="0">
+              <a:rPr lang="en-US" sz="2062" dirty="0">
                 <a:solidFill>
                   <a:srgbClr val="000000"/>
                 </a:solidFill>
@@ -498,8 +498,8 @@
         </p:nvSpPr>
         <p:spPr>
           <a:xfrm>
-            <a:off x="2322739" y="4780643"/>
-            <a:ext cx="2344964" cy="1193800"/>
+            <a:off x="814296" y="4607489"/>
+            <a:ext cx="1964026" cy="999868"/>
           </a:xfrm>
           <a:prstGeom prst="rect">
             <a:avLst/>
@@ -507,7 +507,7 @@
           <a:solidFill>
             <a:srgbClr val="FDE68A"/>
           </a:solidFill>
-          <a:ln w="21318">
+          <a:ln w="17855">
             <a:solidFill>
               <a:srgbClr val="B45309"/>
             </a:solidFill>
@@ -522,8 +522,8 @@
         </p:nvSpPr>
         <p:spPr>
           <a:xfrm>
-            <a:off x="2322739" y="4780643"/>
-            <a:ext cx="2344964" cy="1193800"/>
+            <a:off x="814296" y="4607489"/>
+            <a:ext cx="1964026" cy="999868"/>
           </a:xfrm>
           <a:prstGeom prst="rect">
             <a:avLst/>
@@ -546,7 +546,7 @@
               </a:spcAft>
             </a:pPr>
             <a:r>
-              <a:rPr lang="en-US" sz="2462" dirty="0">
+              <a:rPr lang="en-US" sz="2062" dirty="0">
                 <a:solidFill>
                   <a:srgbClr val="000000"/>
                 </a:solidFill>
@@ -564,8 +564,8 @@
         </p:nvSpPr>
         <p:spPr>
           <a:xfrm>
-            <a:off x="7524296" y="4780643"/>
-            <a:ext cx="2344964" cy="1193800"/>
+            <a:off x="5170862" y="4607489"/>
+            <a:ext cx="1964026" cy="999868"/>
           </a:xfrm>
           <a:prstGeom prst="ellipse">
             <a:avLst/>
@@ -573,7 +573,7 @@
           <a:solidFill>
             <a:srgbClr val="DAE8FC"/>
           </a:solidFill>
-          <a:ln w="21318">
+          <a:ln w="17855">
             <a:solidFill>
               <a:srgbClr val="6C8EBF"/>
             </a:solidFill>
@@ -588,8 +588,8 @@
         </p:nvSpPr>
         <p:spPr>
           <a:xfrm>
-            <a:off x="7524296" y="4780643"/>
-            <a:ext cx="2344964" cy="1193800"/>
+            <a:off x="5170862" y="4607489"/>
+            <a:ext cx="1964026" cy="999868"/>
           </a:xfrm>
           <a:prstGeom prst="rect">
             <a:avLst/>
@@ -612,7 +612,7 @@
               </a:spcAft>
             </a:pPr>
             <a:r>
-              <a:rPr lang="en-US" sz="2462" dirty="0">
+              <a:rPr lang="en-US" sz="2062" dirty="0">
                 <a:solidFill>
                   <a:srgbClr val="000000"/>
                 </a:solidFill>
@@ -630,13 +630,13 @@
         </p:nvCxnSpPr>
         <p:spPr>
           <a:xfrm>
-            <a:off x="3546239" y="2648857"/>
-            <a:ext cx="40084" cy="468993"/>
+            <a:off x="1839038" y="2822011"/>
+            <a:ext cx="33573" cy="392805"/>
           </a:xfrm>
           <a:prstGeom prst="line">
             <a:avLst/>
           </a:prstGeom>
-          <a:ln w="28424">
+          <a:ln w="23806">
             <a:solidFill>
               <a:srgbClr val="404040"/>
             </a:solidFill>
@@ -653,13 +653,13 @@
         </p:nvCxnSpPr>
         <p:spPr>
           <a:xfrm flipV="1">
-            <a:off x="8605677" y="2648857"/>
-            <a:ext cx="40084" cy="468993"/>
+            <a:off x="6076573" y="2822011"/>
+            <a:ext cx="33573" cy="392805"/>
           </a:xfrm>
           <a:prstGeom prst="line">
             <a:avLst/>
           </a:prstGeom>
-          <a:ln w="28424">
+          <a:ln w="23806">
             <a:solidFill>
               <a:srgbClr val="404040"/>
             </a:solidFill>
@@ -676,13 +676,13 @@
         </p:nvCxnSpPr>
         <p:spPr>
           <a:xfrm>
-            <a:off x="4667704" y="5377543"/>
-            <a:ext cx="2856593" cy="2"/>
+            <a:off x="2778322" y="5107423"/>
+            <a:ext cx="2392541" cy="2"/>
           </a:xfrm>
           <a:prstGeom prst="line">
             <a:avLst/>
           </a:prstGeom>
-          <a:ln w="28424">
+          <a:ln w="23806">
             <a:solidFill>
               <a:srgbClr val="404040"/>
             </a:solidFill>
@@ -699,8 +699,8 @@
         </p:nvSpPr>
         <p:spPr>
           <a:xfrm>
-            <a:off x="5680303" y="5185682"/>
-            <a:ext cx="831396" cy="383721"/>
+            <a:off x="3626425" y="4946730"/>
+            <a:ext cx="696336" cy="321386"/>
           </a:xfrm>
           <a:prstGeom prst="rect">
             <a:avLst/>
@@ -725,12 +725,198 @@
               </a:spcAft>
             </a:pPr>
             <a:r>
-              <a:rPr lang="en-US" sz="2014" dirty="0">
+              <a:rPr lang="en-US" sz="1687" dirty="0">
                 <a:solidFill>
                   <a:srgbClr val="000000"/>
                 </a:solidFill>
               </a:rPr>
               <a:t>text</a:t>
+            </a:r>
+          </a:p>
+        </p:txBody>
+      </p:sp>
+      <p:sp>
+        <p:nvSpPr>
+          <p:cNvPr id="4" name="Mermaid source"/>
+          <p:cNvSpPr/>
+          <p:nvPr/>
+        </p:nvSpPr>
+        <p:spPr>
+          <a:xfrm>
+            <a:off x="7674864" y="1028700"/>
+            <a:ext cx="4059936" cy="5372100"/>
+          </a:xfrm>
+          <a:prstGeom prst="rect">
+            <a:avLst/>
+          </a:prstGeom>
+          <a:solidFill>
+            <a:srgbClr val="F3F4F6"/>
+          </a:solidFill>
+          <a:ln w="9525">
+            <a:solidFill>
+              <a:srgbClr val="D1D5DB"/>
+            </a:solidFill>
+          </a:ln>
+        </p:spPr>
+        <p:txBody>
+          <a:bodyPr wrap="square" lIns="91440" tIns="45720" rIns="91440" bIns="45720" anchor="t">
+            <a:noAutofit/>
+          </a:bodyPr>
+          <a:lstStyle/>
+          <a:p>
+            <a:pPr algn="l"/>
+            <a:r>
+              <a:rPr lang="en-US" sz="1400" dirty="0">
+                <a:solidFill>
+                  <a:srgbClr val="1F2937"/>
+                </a:solidFill>
+                <a:latin typeface="Consolas"/>
+                <a:cs typeface="Consolas"/>
+              </a:rPr>
+              <a:t>block-beta</a:t>
+            </a:r>
+          </a:p>
+          <a:p>
+            <a:pPr algn="l"/>
+            <a:r>
+              <a:rPr lang="en-US" sz="1400" dirty="0">
+                <a:solidFill>
+                  <a:srgbClr val="1F2937"/>
+                </a:solidFill>
+                <a:latin typeface="Consolas"/>
+                <a:cs typeface="Consolas"/>
+              </a:rPr>
+              <a:t>    columns 3</a:t>
+            </a:r>
+          </a:p>
+          <a:p>
+            <a:pPr algn="l"/>
+            <a:r>
+              <a:rPr lang="en-US" sz="1400" dirty="0">
+                <a:solidFill>
+                  <a:srgbClr val="1F2937"/>
+                </a:solidFill>
+                <a:latin typeface="Consolas"/>
+                <a:cs typeface="Consolas"/>
+              </a:rPr>
+              <a:t>    doc["Document"] space:1 db[("Database")]</a:t>
+            </a:r>
+          </a:p>
+          <a:p>
+            <a:pPr algn="l"/>
+            <a:r>
+              <a:rPr lang="en-US" sz="1400" dirty="0">
+                <a:solidFill>
+                  <a:srgbClr val="1F2937"/>
+                </a:solidFill>
+                <a:latin typeface="Consolas"/>
+                <a:cs typeface="Consolas"/>
+              </a:rPr>
+              <a:t>    block:pipeline:3</a:t>
+            </a:r>
+          </a:p>
+          <a:p>
+            <a:pPr algn="l"/>
+            <a:r>
+              <a:rPr lang="en-US" sz="1400" dirty="0">
+                <a:solidFill>
+                  <a:srgbClr val="1F2937"/>
+                </a:solidFill>
+                <a:latin typeface="Consolas"/>
+                <a:cs typeface="Consolas"/>
+              </a:rPr>
+              <a:t>        columns 3</a:t>
+            </a:r>
+          </a:p>
+          <a:p>
+            <a:pPr algn="l"/>
+            <a:r>
+              <a:rPr lang="en-US" sz="1400" dirty="0">
+                <a:solidFill>
+                  <a:srgbClr val="1F2937"/>
+                </a:solidFill>
+                <a:latin typeface="Consolas"/>
+                <a:cs typeface="Consolas"/>
+              </a:rPr>
+              <a:t>        parse["Parse"] layout("Layout") emit(["Emit"])</a:t>
+            </a:r>
+          </a:p>
+          <a:p>
+            <a:pPr algn="l"/>
+            <a:r>
+              <a:rPr lang="en-US" sz="1400" dirty="0">
+                <a:solidFill>
+                  <a:srgbClr val="1F2937"/>
+                </a:solidFill>
+                <a:latin typeface="Consolas"/>
+                <a:cs typeface="Consolas"/>
+              </a:rPr>
+              <a:t>    end</a:t>
+            </a:r>
+          </a:p>
+          <a:p>
+            <a:pPr algn="l"/>
+            <a:r>
+              <a:rPr lang="en-US" sz="1400" dirty="0">
+                <a:solidFill>
+                  <a:srgbClr val="1F2937"/>
+                </a:solidFill>
+                <a:latin typeface="Consolas"/>
+                <a:cs typeface="Consolas"/>
+              </a:rPr>
+              <a:t>    a["Input"] space b(("Out"))</a:t>
+            </a:r>
+          </a:p>
+          <a:p>
+            <a:pPr algn="l"/>
+            <a:r>
+              <a:rPr lang="en-US" sz="1400" dirty="0">
+                <a:solidFill>
+                  <a:srgbClr val="1F2937"/>
+                </a:solidFill>
+                <a:latin typeface="Consolas"/>
+                <a:cs typeface="Consolas"/>
+              </a:rPr>
+              <a:t>    doc --&gt; parse</a:t>
+            </a:r>
+          </a:p>
+          <a:p>
+            <a:pPr algn="l"/>
+            <a:r>
+              <a:rPr lang="en-US" sz="1400" dirty="0">
+                <a:solidFill>
+                  <a:srgbClr val="1F2937"/>
+                </a:solidFill>
+                <a:latin typeface="Consolas"/>
+                <a:cs typeface="Consolas"/>
+              </a:rPr>
+              <a:t>    emit --&gt; db</a:t>
+            </a:r>
+          </a:p>
+          <a:p>
+            <a:pPr algn="l"/>
+            <a:r>
+              <a:rPr lang="en-US" sz="1400" dirty="0">
+                <a:solidFill>
+                  <a:srgbClr val="1F2937"/>
+                </a:solidFill>
+                <a:latin typeface="Consolas"/>
+                <a:cs typeface="Consolas"/>
+              </a:rPr>
+              <a:t>    a -- "text" --&gt; b</a:t>
+            </a:r>
+          </a:p>
+          <a:p>
+            <a:pPr algn="l"/>
+            <a:r>
+              <a:rPr lang="en-US" sz="1400" dirty="0">
+                <a:solidFill>
+                  <a:srgbClr val="1F2937"/>
+                </a:solidFill>
+                <a:latin typeface="Consolas"/>
+                <a:cs typeface="Consolas"/>
+              </a:rPr>
+              <a:t>    style a fill:#fde68a,stroke:#b45309</a:t>
             </a:r>
           </a:p>
         </p:txBody>
